--- a/pptx/maio_2026/FRETE_CLICK.pptx
+++ b/pptx/maio_2026/FRETE_CLICK.pptx
@@ -147,10 +147,10 @@
               <c:strCache>
                 <c:ptCount val="2"/>
                 <c:pt idx="0">
-                  <c:v>Maio 2026</c:v>
+                  <c:v>Abril 2026</c:v>
                 </c:pt>
                 <c:pt idx="1">
-                  <c:v>Abril 2026</c:v>
+                  <c:v>Maio 2026</c:v>
                 </c:pt>
               </c:strCache>
             </c:strRef>
@@ -161,11 +161,12 @@
               <c:numCache>
                 <c:formatCode>General</c:formatCode>
                 <c:ptCount val="2"/>
+                <c:formatCode>General</c:formatCode>
                 <c:pt idx="0">
-                  <c:v>596</c:v>
+                  <c:v>64</c:v>
                 </c:pt>
                 <c:pt idx="1">
-                  <c:v>575</c:v>
+                  <c:v>64</c:v>
                 </c:pt>
               </c:numCache>
             </c:numRef>
@@ -196,10 +197,10 @@
               <c:strCache>
                 <c:ptCount val="2"/>
                 <c:pt idx="0">
-                  <c:v>Maio 2026</c:v>
+                  <c:v>Abril 2026</c:v>
                 </c:pt>
                 <c:pt idx="1">
-                  <c:v>Abril 2026</c:v>
+                  <c:v>Maio 2026</c:v>
                 </c:pt>
               </c:strCache>
             </c:strRef>
@@ -210,11 +211,12 @@
               <c:numCache>
                 <c:formatCode>General</c:formatCode>
                 <c:ptCount val="2"/>
+                <c:formatCode>General</c:formatCode>
                 <c:pt idx="0">
-                  <c:v>22</c:v>
+                  <c:v>1</c:v>
                 </c:pt>
                 <c:pt idx="1">
-                  <c:v>2</c:v>
+                  <c:v>1</c:v>
                 </c:pt>
               </c:numCache>
             </c:numRef>
@@ -4296,23 +4298,6 @@
                     <a:p>
                       <a:pPr algn="l"/>
                       <a:r>
-                        <a:t>60</a:t>
-                      </a:r>
-                    </a:p>
-                  </a:txBody>
-                  <a:tcPr>
-                    <a:solidFill>
-                      <a:srgbClr val="F2F2F2"/>
-                    </a:solidFill>
-                  </a:tcPr>
-                </a:tc>
-                <a:tc>
-                  <a:txBody>
-                    <a:bodyPr/>
-                    <a:lstStyle/>
-                    <a:p>
-                      <a:pPr algn="l"/>
-                      <a:r>
                         <a:t>64</a:t>
                       </a:r>
                     </a:p>
@@ -4330,7 +4315,24 @@
                     <a:p>
                       <a:pPr algn="l"/>
                       <a:r>
-                        <a:t>+4</a:t>
+                        <a:t>64</a:t>
+                      </a:r>
+                    </a:p>
+                  </a:txBody>
+                  <a:tcPr>
+                    <a:solidFill>
+                      <a:srgbClr val="F2F2F2"/>
+                    </a:solidFill>
+                  </a:tcPr>
+                </a:tc>
+                <a:tc>
+                  <a:txBody>
+                    <a:bodyPr/>
+                    <a:lstStyle/>
+                    <a:p>
+                      <a:pPr algn="l"/>
+                      <a:r>
+                        <a:t>0</a:t>
                       </a:r>
                     </a:p>
                   </a:txBody>
@@ -4366,23 +4368,6 @@
                     <a:p>
                       <a:pPr algn="l"/>
                       <a:r>
-                        <a:t>5</a:t>
-                      </a:r>
-                    </a:p>
-                  </a:txBody>
-                  <a:tcPr>
-                    <a:solidFill>
-                      <a:srgbClr val="FFFFFF"/>
-                    </a:solidFill>
-                  </a:tcPr>
-                </a:tc>
-                <a:tc>
-                  <a:txBody>
-                    <a:bodyPr/>
-                    <a:lstStyle/>
-                    <a:p>
-                      <a:pPr algn="l"/>
-                      <a:r>
                         <a:t>1</a:t>
                       </a:r>
                     </a:p>
@@ -4400,7 +4385,24 @@
                     <a:p>
                       <a:pPr algn="l"/>
                       <a:r>
-                        <a:t>-4</a:t>
+                        <a:t>1</a:t>
+                      </a:r>
+                    </a:p>
+                  </a:txBody>
+                  <a:tcPr>
+                    <a:solidFill>
+                      <a:srgbClr val="FFFFFF"/>
+                    </a:solidFill>
+                  </a:tcPr>
+                </a:tc>
+                <a:tc>
+                  <a:txBody>
+                    <a:bodyPr/>
+                    <a:lstStyle/>
+                    <a:p>
+                      <a:pPr algn="l"/>
+                      <a:r>
+                        <a:t>0</a:t>
                       </a:r>
                     </a:p>
                   </a:txBody>
@@ -4436,23 +4438,6 @@
                     <a:p>
                       <a:pPr algn="l"/>
                       <a:r>
-                        <a:t>92.3%</a:t>
-                      </a:r>
-                    </a:p>
-                  </a:txBody>
-                  <a:tcPr>
-                    <a:solidFill>
-                      <a:srgbClr val="F2F2F2"/>
-                    </a:solidFill>
-                  </a:tcPr>
-                </a:tc>
-                <a:tc>
-                  <a:txBody>
-                    <a:bodyPr/>
-                    <a:lstStyle/>
-                    <a:p>
-                      <a:pPr algn="l"/>
-                      <a:r>
                         <a:t>98.46%</a:t>
                       </a:r>
                     </a:p>
@@ -4470,7 +4455,24 @@
                     <a:p>
                       <a:pPr algn="l"/>
                       <a:r>
-                        <a:t>+6.16pp</a:t>
+                        <a:t>98.46%</a:t>
+                      </a:r>
+                    </a:p>
+                  </a:txBody>
+                  <a:tcPr>
+                    <a:solidFill>
+                      <a:srgbClr val="F2F2F2"/>
+                    </a:solidFill>
+                  </a:tcPr>
+                </a:tc>
+                <a:tc>
+                  <a:txBody>
+                    <a:bodyPr/>
+                    <a:lstStyle/>
+                    <a:p>
+                      <a:pPr algn="l"/>
+                      <a:r>
+                        <a:t>+0.0pp</a:t>
                       </a:r>
                     </a:p>
                   </a:txBody>
@@ -4902,41 +4904,41 @@
                     <a:p>
                       <a:pPr algn="l"/>
                       <a:r>
-                        <a:t>60</a:t>
-                      </a:r>
-                    </a:p>
-                  </a:txBody>
-                  <a:tcPr>
-                    <a:solidFill>
-                      <a:srgbClr val="F2F2F2"/>
-                    </a:solidFill>
-                  </a:tcPr>
-                </a:tc>
-                <a:tc>
-                  <a:txBody>
-                    <a:bodyPr/>
-                    <a:lstStyle/>
-                    <a:p>
-                      <a:pPr algn="l"/>
-                      <a:r>
-                        <a:t>5</a:t>
-                      </a:r>
-                    </a:p>
-                  </a:txBody>
-                  <a:tcPr>
-                    <a:solidFill>
-                      <a:srgbClr val="F2F2F2"/>
-                    </a:solidFill>
-                  </a:tcPr>
-                </a:tc>
-                <a:tc>
-                  <a:txBody>
-                    <a:bodyPr/>
-                    <a:lstStyle/>
-                    <a:p>
-                      <a:pPr algn="l"/>
-                      <a:r>
-                        <a:t>92.3%</a:t>
+                        <a:t>64</a:t>
+                      </a:r>
+                    </a:p>
+                  </a:txBody>
+                  <a:tcPr>
+                    <a:solidFill>
+                      <a:srgbClr val="F2F2F2"/>
+                    </a:solidFill>
+                  </a:tcPr>
+                </a:tc>
+                <a:tc>
+                  <a:txBody>
+                    <a:bodyPr/>
+                    <a:lstStyle/>
+                    <a:p>
+                      <a:pPr algn="l"/>
+                      <a:r>
+                        <a:t>1</a:t>
+                      </a:r>
+                    </a:p>
+                  </a:txBody>
+                  <a:tcPr>
+                    <a:solidFill>
+                      <a:srgbClr val="F2F2F2"/>
+                    </a:solidFill>
+                  </a:tcPr>
+                </a:tc>
+                <a:tc>
+                  <a:txBody>
+                    <a:bodyPr/>
+                    <a:lstStyle/>
+                    <a:p>
+                      <a:pPr algn="l"/>
+                      <a:r>
+                        <a:t>98.46%</a:t>
                       </a:r>
                     </a:p>
                   </a:txBody>
@@ -5024,7 +5026,7 @@
                 </a:solidFill>
                 <a:latin typeface="Calibri"/>
               </a:rPr>
-              <a:t>PERFORMANCE: 92.3% → 98.46% - Excelente</a:t>
+              <a:t>PERFORMANCE: 98.46% → 98.46% - Excelente</a:t>
             </a:r>
           </a:p>
         </p:txBody>
@@ -5324,7 +5326,7 @@
                     <a:p>
                       <a:pPr algn="l"/>
                       <a:r>
-                        <a:t>CRISTIANE FERNANDES - GUA - GU - GUARUJA</a:t>
+                        <a:t>CRISTIANE FERNANDES - GUARUJA / SP</a:t>
                       </a:r>
                     </a:p>
                   </a:txBody>
@@ -6895,7 +6897,7 @@
                 </a:solidFill>
                 <a:latin typeface="Calibri"/>
               </a:rPr>
-              <a:t>TOP DESTINATARIOS (98 pontos)</a:t>
+              <a:t>TOP DESTINATARIOS (65 pontos)</a:t>
             </a:r>
           </a:p>
         </p:txBody>
@@ -7158,7 +7160,7 @@
                     <a:p>
                       <a:pPr algn="l"/>
                       <a:r>
-                        <a:t>KELLEM CRISTIANE JUS - SA - SANTOS / SP</a:t>
+                        <a:t>KELLEM CRISTIANE JUS - SANTOS / SP</a:t>
                       </a:r>
                     </a:p>
                   </a:txBody>
@@ -7279,7 +7281,7 @@
                     <a:p>
                       <a:pPr algn="l"/>
                       <a:r>
-                        <a:t>CONJUNTO RESIDENCIAL - SA - SAO BERNARDO</a:t>
+                        <a:t>CONJUNTO RESIDENCIAL - SAO BERNARDO DO CAMPO / SP</a:t>
                       </a:r>
                     </a:p>
                   </a:txBody>
@@ -7400,7 +7402,7 @@
                     <a:p>
                       <a:pPr algn="l"/>
                       <a:r>
-                        <a:t>CONDOMINIO PERINI BU - JO - JOINVILLE / </a:t>
+                        <a:t>CONDOMINIO PERINI BU - JOINVILLE / SC</a:t>
                       </a:r>
                     </a:p>
                   </a:txBody>
@@ -7521,7 +7523,7 @@
                     <a:p>
                       <a:pPr algn="l"/>
                       <a:r>
-                        <a:t>SUELLEN LUCIANO - BALNEAR - BALNEARIO CA</a:t>
+                        <a:t>SUELLEN LUCIANO - BALNEARIO CAMBORIU / SC</a:t>
                       </a:r>
                     </a:p>
                   </a:txBody>
@@ -7642,7 +7644,7 @@
                     <a:p>
                       <a:pPr algn="l"/>
                       <a:r>
-                        <a:t>CAMILA HOFFMANN - BIGUACU - BIGUACU / SC</a:t>
+                        <a:t>CAMILA HOFFMANN - BIGUACU / SC</a:t>
                       </a:r>
                     </a:p>
                   </a:txBody>
@@ -7763,7 +7765,7 @@
                     <a:p>
                       <a:pPr algn="l"/>
                       <a:r>
-                        <a:t>COROVA ROCHA SERVICO - BA - BALNEARIO CA</a:t>
+                        <a:t>COROVA ROCHA SERVICO - BALNEARIO CAMBORIU / SC</a:t>
                       </a:r>
                     </a:p>
                   </a:txBody>
@@ -7884,7 +7886,7 @@
                     <a:p>
                       <a:pPr algn="l"/>
                       <a:r>
-                        <a:t>ROK GESTAO DE PATRIM - SA - SANTANA DE P</a:t>
+                        <a:t>ROK GESTAO DE PATRIM - SANTANA DE PARNAIBA / SP</a:t>
                       </a:r>
                     </a:p>
                   </a:txBody>
@@ -8005,7 +8007,7 @@
                     <a:p>
                       <a:pPr algn="l"/>
                       <a:r>
-                        <a:t>GREICE PIOTROVSKI - BARUE - BARUERI / SP</a:t>
+                        <a:t>GREICE PIOTROVSKI - BARUERI / SP</a:t>
                       </a:r>
                     </a:p>
                   </a:txBody>
@@ -8126,7 +8128,7 @@
                     <a:p>
                       <a:pPr algn="l"/>
                       <a:r>
-                        <a:t>DEBORA MURTA LANA - SANTA - SANTANA DE P</a:t>
+                        <a:t>DEBORA MURTA LANA - SANTANA DE PARNAIBA / SP</a:t>
                       </a:r>
                     </a:p>
                   </a:txBody>
@@ -8247,7 +8249,7 @@
                     <a:p>
                       <a:pPr algn="l"/>
                       <a:r>
-                        <a:t>ROBERTA RAMOS FERNAN - SA - SANTOS / SP</a:t>
+                        <a:t>ROBERTA RAMOS FERNAN - SANTOS / SP</a:t>
                       </a:r>
                     </a:p>
                   </a:txBody>
@@ -8368,7 +8370,7 @@
                     <a:p>
                       <a:pPr algn="l"/>
                       <a:r>
-                        <a:t>GEOVANE FARIA - SAO PAULO - SAO PAULO / </a:t>
+                        <a:t>GEOVANE FARIA - SAO PAULO / SP</a:t>
                       </a:r>
                     </a:p>
                   </a:txBody>
@@ -8489,7 +8491,7 @@
                     <a:p>
                       <a:pPr algn="l"/>
                       <a:r>
-                        <a:t>ANTARES CLUB SA HOTE - FL - FLORIANOPOLI</a:t>
+                        <a:t>ANTARES CLUB SA HOTE - FLORIANOPOLIS / SC</a:t>
                       </a:r>
                     </a:p>
                   </a:txBody>
@@ -8610,7 +8612,7 @@
                     <a:p>
                       <a:pPr algn="l"/>
                       <a:r>
-                        <a:t>CONDOMINIO PODIUM VI - SA - SAO PAULO / </a:t>
+                        <a:t>CONDOMINIO PODIUM VI - SAO PAULO / SP</a:t>
                       </a:r>
                     </a:p>
                   </a:txBody>
@@ -8731,7 +8733,7 @@
                     <a:p>
                       <a:pPr algn="l"/>
                       <a:r>
-                        <a:t>VICTA PL LTDA - SAO PAULO - SAO PAULO / </a:t>
+                        <a:t>VICTA PL LTDA - SAO PAULO / SP</a:t>
                       </a:r>
                     </a:p>
                   </a:txBody>
@@ -9247,66 +9249,6 @@
           </a:p>
         </p:txBody>
       </p:sp>
-      <p:sp useBgFill="1">
-        <p:nvSpPr>
-          <p:cNvPr id="29" name="Rectangle 22">
-            <a:extLst>
-              <a:ext uri="{FF2B5EF4-FFF2-40B4-BE49-F238E27FC236}">
-                <a16:creationId xmlns:a16="http://schemas.microsoft.com/office/drawing/2014/main" id="{F0087D53-9295-4463-AAE4-D5C626046E9F}"/>
-              </a:ext>
-              <a:ext uri="{C183D7F6-B498-43B3-948B-1728B52AA6E4}">
-                <adec:decorative xmlns:adec="http://schemas.microsoft.com/office/drawing/2017/decorative" val="1"/>
-              </a:ext>
-            </a:extLst>
-          </p:cNvPr>
-          <p:cNvSpPr>
-            <a:spLocks noGrp="1" noRot="1" noChangeAspect="1" noMove="1" noResize="1" noEditPoints="1" noAdjustHandles="1" noChangeArrowheads="1" noChangeShapeType="1" noTextEdit="1"/>
-          </p:cNvSpPr>
-          <p:nvPr>
-            <p:extLst>
-              <p:ext uri="{386F3935-93C4-4BCD-93E2-E3B085C9AB24}">
-                <p16:designElem xmlns:p16="http://schemas.microsoft.com/office/powerpoint/2015/main" val="1"/>
-              </p:ext>
-            </p:extLst>
-          </p:nvPr>
-        </p:nvSpPr>
-        <p:spPr>
-          <a:xfrm>
-            <a:off x="0" y="0"/>
-            <a:ext cx="12188952" cy="6858000"/>
-          </a:xfrm>
-          <a:prstGeom prst="rect">
-            <a:avLst/>
-          </a:prstGeom>
-          <a:ln>
-            <a:noFill/>
-          </a:ln>
-        </p:spPr>
-        <p:style>
-          <a:lnRef idx="2">
-            <a:schemeClr val="accent1">
-              <a:shade val="50000"/>
-            </a:schemeClr>
-          </a:lnRef>
-          <a:fillRef idx="1">
-            <a:schemeClr val="accent1"/>
-          </a:fillRef>
-          <a:effectRef idx="0">
-            <a:schemeClr val="accent1"/>
-          </a:effectRef>
-          <a:fontRef idx="minor">
-            <a:schemeClr val="lt1"/>
-          </a:fontRef>
-        </p:style>
-        <p:txBody>
-          <a:bodyPr rtlCol="0" anchor="ctr"/>
-          <a:lstStyle/>
-          <a:p>
-            <a:pPr algn="ctr"/>
-            <a:endParaRPr lang="en-US"/>
-          </a:p>
-        </p:txBody>
-      </p:sp>
     </p:spTree>
   </p:cSld>
   <p:clrMapOvr>
